--- a/assets/pptx/catalog-85.pptx
+++ b/assets/pptx/catalog-85.pptx
@@ -3421,7 +3421,7 @@
                 <a:ea typeface="Ebrima"/>
                 <a:cs typeface="Ebrima"/>
               </a:rPr>
-              <a:t>አቤቱ አመሰግንሃለሁ (4x)</a:t>
+              <a:t>አቤቱ አመሰግንሃለሁ 4x</a:t>
             </a:r>
           </a:p>
         </p:txBody>
@@ -3663,7 +3663,7 @@
                 <a:ea typeface="Ebrima"/>
                 <a:cs typeface="Ebrima"/>
               </a:rPr>
-              <a:t>አቤቱ አመሰግንሃለሁ (4x)</a:t>
+              <a:t>አቤቱ አመሰግንሃለሁ 4x</a:t>
             </a:r>
           </a:p>
         </p:txBody>
@@ -3905,7 +3905,7 @@
                 <a:ea typeface="Ebrima"/>
                 <a:cs typeface="Ebrima"/>
               </a:rPr>
-              <a:t>አቤቱ አመሰግንሃለሁ (4x)</a:t>
+              <a:t>አቤቱ አመሰግንሃለሁ 4x</a:t>
             </a:r>
           </a:p>
           <a:p>
@@ -3941,7 +3941,7 @@
                 <a:ea typeface="Ebrima"/>
                 <a:cs typeface="Ebrima"/>
               </a:rPr>
-              <a:t>አቤቱ አመሰግንሃለሁ (4x)</a:t>
+              <a:t>አቤቱ አመሰግንሃለሁ 4x</a:t>
             </a:r>
           </a:p>
         </p:txBody>
